--- a/11/ppt/11-2_SQLite_데이터_저장_연결하기_v1.pptx
+++ b/11/ppt/11-2_SQLite_데이터_저장_연결하기_v1.pptx
@@ -5885,7 +5885,7 @@
                 <a:ea typeface="IBM Plex Sans KR" pitchFamily="34" charset="-122"/>
                 <a:cs typeface="IBM Plex Sans KR" pitchFamily="34" charset="-120"/>
               </a:rPr>
-              <a:t>열 이름 · 자료형 · 키를 학생이 새로 짜지 않는다.</a:t>
+              <a:t>열 이름 · 자료형 · 키를 새로 짜지 않는다.</a:t>
             </a:r>
             <a:endParaRPr lang="en-US" sz="1250" dirty="0"/>
           </a:p>
